--- a/reference_content/Slides/NLP_2.pptx
+++ b/reference_content/Slides/NLP_2.pptx
@@ -32,24 +32,25 @@
     <p:sldId id="278" r:id="rId26"/>
     <p:sldId id="267" r:id="rId27"/>
     <p:sldId id="282" r:id="rId28"/>
-    <p:sldId id="292" r:id="rId29"/>
-    <p:sldId id="279" r:id="rId30"/>
-    <p:sldId id="296" r:id="rId31"/>
-    <p:sldId id="266" r:id="rId32"/>
-    <p:sldId id="277" r:id="rId33"/>
-    <p:sldId id="269" r:id="rId34"/>
-    <p:sldId id="305" r:id="rId35"/>
-    <p:sldId id="290" r:id="rId36"/>
-    <p:sldId id="293" r:id="rId37"/>
-    <p:sldId id="289" r:id="rId38"/>
-    <p:sldId id="295" r:id="rId39"/>
-    <p:sldId id="268" r:id="rId40"/>
-    <p:sldId id="297" r:id="rId41"/>
-    <p:sldId id="287" r:id="rId42"/>
-    <p:sldId id="304" r:id="rId43"/>
-    <p:sldId id="263" r:id="rId44"/>
-    <p:sldId id="264" r:id="rId45"/>
-    <p:sldId id="285" r:id="rId46"/>
+    <p:sldId id="279" r:id="rId29"/>
+    <p:sldId id="306" r:id="rId30"/>
+    <p:sldId id="292" r:id="rId31"/>
+    <p:sldId id="296" r:id="rId32"/>
+    <p:sldId id="266" r:id="rId33"/>
+    <p:sldId id="277" r:id="rId34"/>
+    <p:sldId id="269" r:id="rId35"/>
+    <p:sldId id="305" r:id="rId36"/>
+    <p:sldId id="290" r:id="rId37"/>
+    <p:sldId id="293" r:id="rId38"/>
+    <p:sldId id="289" r:id="rId39"/>
+    <p:sldId id="295" r:id="rId40"/>
+    <p:sldId id="268" r:id="rId41"/>
+    <p:sldId id="297" r:id="rId42"/>
+    <p:sldId id="287" r:id="rId43"/>
+    <p:sldId id="304" r:id="rId44"/>
+    <p:sldId id="263" r:id="rId45"/>
+    <p:sldId id="264" r:id="rId46"/>
+    <p:sldId id="285" r:id="rId47"/>
   </p:sldIdLst>
   <p:sldSz cx="12192000" cy="6858000"/>
   <p:notesSz cx="6858000" cy="9144000"/>
@@ -196,8 +197,9 @@
             <p14:sldId id="278"/>
             <p14:sldId id="267"/>
             <p14:sldId id="282"/>
+            <p14:sldId id="279"/>
+            <p14:sldId id="306"/>
             <p14:sldId id="292"/>
-            <p14:sldId id="279"/>
             <p14:sldId id="296"/>
           </p14:sldIdLst>
         </p14:section>
@@ -3817,34 +3819,22 @@
           <a:p>
             <a:r>
               <a:rPr lang="en-US" dirty="0"/>
-              <a:t>Text processing project. </a:t>
-            </a:r>
-          </a:p>
-          <a:p>
-            <a:pPr lvl="1"/>
-            <a:r>
-              <a:rPr lang="en-US" dirty="0"/>
-              <a:t>You can tackle this after today. </a:t>
-            </a:r>
-          </a:p>
-          <a:p>
-            <a:pPr lvl="1"/>
-            <a:r>
-              <a:rPr lang="en-US" dirty="0"/>
-              <a:t>Be attentive to the details – for this you need to produce a specific output. </a:t>
-            </a:r>
-          </a:p>
-          <a:p>
-            <a:pPr lvl="1"/>
-            <a:r>
-              <a:rPr lang="en-US" dirty="0"/>
-              <a:t>Trial and experimentation are probably needed, and this is pretty well suited to splitting work.</a:t>
-            </a:r>
-          </a:p>
-          <a:p>
-            <a:r>
-              <a:rPr lang="en-US" dirty="0"/>
               <a:t>Today – more text processing and NLP. </a:t>
+            </a:r>
+          </a:p>
+          <a:p>
+            <a:pPr lvl="1"/>
+            <a:r>
+              <a:rPr lang="en-US" dirty="0"/>
+              <a:t>Chapter 7 in </a:t>
+            </a:r>
+            <a:r>
+              <a:rPr lang="en-US" dirty="0" err="1"/>
+              <a:t>ItMLwP</a:t>
+            </a:r>
+            <a:r>
+              <a:rPr lang="en-US" dirty="0"/>
+              <a:t>. </a:t>
             </a:r>
           </a:p>
           <a:p>
@@ -3866,13 +3856,7 @@
             <a:pPr lvl="1"/>
             <a:r>
               <a:rPr lang="en-US" dirty="0"/>
-              <a:t>Embeddings. </a:t>
-            </a:r>
-          </a:p>
-          <a:p>
-            <a:r>
-              <a:rPr lang="en-US" dirty="0"/>
-              <a:t>Did you all do Bayes models in stats? Ideally making the model from scratch. </a:t>
+              <a:t>Embeddings and word2vec. </a:t>
             </a:r>
           </a:p>
         </p:txBody>
@@ -6866,176 +6850,6 @@
 </file>
 
 <file path=ppt/slides/slide28.xml><?xml version="1.0" encoding="utf-8"?>
-<p:sld xmlns:a="http://schemas.openxmlformats.org/drawingml/2006/main" xmlns:r="http://schemas.openxmlformats.org/officeDocument/2006/relationships" xmlns:p="http://schemas.openxmlformats.org/presentationml/2006/main" show="0">
-  <p:cSld>
-    <p:spTree>
-      <p:nvGrpSpPr>
-        <p:cNvPr id="1" name=""/>
-        <p:cNvGrpSpPr/>
-        <p:nvPr/>
-      </p:nvGrpSpPr>
-      <p:grpSpPr>
-        <a:xfrm>
-          <a:off x="0" y="0"/>
-          <a:ext cx="0" cy="0"/>
-          <a:chOff x="0" y="0"/>
-          <a:chExt cx="0" cy="0"/>
-        </a:xfrm>
-      </p:grpSpPr>
-      <p:sp>
-        <p:nvSpPr>
-          <p:cNvPr id="2" name="Title 1">
-            <a:extLst>
-              <a:ext uri="{FF2B5EF4-FFF2-40B4-BE49-F238E27FC236}">
-                <a16:creationId xmlns:a16="http://schemas.microsoft.com/office/drawing/2014/main" id="{E9DCB6D0-BB9E-0B3C-152B-239D65F64D44}"/>
-              </a:ext>
-            </a:extLst>
-          </p:cNvPr>
-          <p:cNvSpPr>
-            <a:spLocks noGrp="1"/>
-          </p:cNvSpPr>
-          <p:nvPr>
-            <p:ph type="title"/>
-          </p:nvPr>
-        </p:nvSpPr>
-        <p:spPr>
-          <a:xfrm>
-            <a:off x="1451580" y="804519"/>
-            <a:ext cx="4859686" cy="1049235"/>
-          </a:xfrm>
-        </p:spPr>
-        <p:txBody>
-          <a:bodyPr/>
-          <a:lstStyle/>
-          <a:p>
-            <a:r>
-              <a:rPr lang="en-US" dirty="0"/>
-              <a:t>Detour – </a:t>
-            </a:r>
-            <a:r>
-              <a:rPr lang="en-US" dirty="0" err="1"/>
-              <a:t>MultiModal</a:t>
-            </a:r>
-            <a:r>
-              <a:rPr lang="en-US" dirty="0"/>
-              <a:t> Models</a:t>
-            </a:r>
-          </a:p>
-        </p:txBody>
-      </p:sp>
-      <p:sp>
-        <p:nvSpPr>
-          <p:cNvPr id="3" name="Content Placeholder 2">
-            <a:extLst>
-              <a:ext uri="{FF2B5EF4-FFF2-40B4-BE49-F238E27FC236}">
-                <a16:creationId xmlns:a16="http://schemas.microsoft.com/office/drawing/2014/main" id="{4123335C-478C-C422-2490-567258DA4CE7}"/>
-              </a:ext>
-            </a:extLst>
-          </p:cNvPr>
-          <p:cNvSpPr>
-            <a:spLocks noGrp="1"/>
-          </p:cNvSpPr>
-          <p:nvPr>
-            <p:ph idx="1"/>
-          </p:nvPr>
-        </p:nvSpPr>
-        <p:spPr>
-          <a:xfrm>
-            <a:off x="1451579" y="1853754"/>
-            <a:ext cx="4859685" cy="4199727"/>
-          </a:xfrm>
-        </p:spPr>
-        <p:txBody>
-          <a:bodyPr/>
-          <a:lstStyle/>
-          <a:p>
-            <a:r>
-              <a:rPr lang="en-US" dirty="0"/>
-              <a:t>Many of the generative models are multi-modal, i.e. they deal with different types of content like text, images, video, </a:t>
-            </a:r>
-            <a:r>
-              <a:rPr lang="en-US" dirty="0" err="1"/>
-              <a:t>etc</a:t>
-            </a:r>
-            <a:r>
-              <a:rPr lang="en-US" dirty="0"/>
-              <a:t>…</a:t>
-            </a:r>
-          </a:p>
-          <a:p>
-            <a:r>
-              <a:rPr lang="en-US" dirty="0"/>
-              <a:t>This works by generating embeddings for each type of media, to a shared space. </a:t>
-            </a:r>
-          </a:p>
-          <a:p>
-            <a:pPr lvl="1"/>
-            <a:r>
-              <a:rPr lang="en-US" dirty="0"/>
-              <a:t>E.g. a picture labeled “</a:t>
-            </a:r>
-            <a:r>
-              <a:rPr lang="en-US" dirty="0" err="1"/>
-              <a:t>horse.jpg</a:t>
-            </a:r>
-            <a:r>
-              <a:rPr lang="en-US" dirty="0"/>
-              <a:t>” tells the model that a horse is X in text and Y in image.</a:t>
-            </a:r>
-          </a:p>
-          <a:p>
-            <a:pPr lvl="1"/>
-            <a:r>
-              <a:rPr lang="en-US" dirty="0"/>
-              <a:t>When someone asks for a horse, it “looks up” the image representations and gens…</a:t>
-            </a:r>
-          </a:p>
-        </p:txBody>
-      </p:sp>
-      <p:pic>
-        <p:nvPicPr>
-          <p:cNvPr id="4" name="Picture 3" descr="How LLMs See Images, Audio, and More">
-            <a:extLst>
-              <a:ext uri="{FF2B5EF4-FFF2-40B4-BE49-F238E27FC236}">
-                <a16:creationId xmlns:a16="http://schemas.microsoft.com/office/drawing/2014/main" id="{06012C61-BA30-0B91-4D6E-DEBD93FEA123}"/>
-              </a:ext>
-            </a:extLst>
-          </p:cNvPr>
-          <p:cNvPicPr>
-            <a:picLocks noChangeAspect="1"/>
-          </p:cNvPicPr>
-          <p:nvPr/>
-        </p:nvPicPr>
-        <p:blipFill>
-          <a:blip r:embed="rId2"/>
-          <a:stretch>
-            <a:fillRect/>
-          </a:stretch>
-        </p:blipFill>
-        <p:spPr>
-          <a:xfrm>
-            <a:off x="6311265" y="0"/>
-            <a:ext cx="5880735" cy="6858000"/>
-          </a:xfrm>
-          <a:prstGeom prst="rect">
-            <a:avLst/>
-          </a:prstGeom>
-        </p:spPr>
-      </p:pic>
-    </p:spTree>
-    <p:extLst>
-      <p:ext uri="{BB962C8B-B14F-4D97-AF65-F5344CB8AC3E}">
-        <p14:creationId xmlns:p14="http://schemas.microsoft.com/office/powerpoint/2010/main" val="769723518"/>
-      </p:ext>
-    </p:extLst>
-  </p:cSld>
-  <p:clrMapOvr>
-    <a:masterClrMapping/>
-  </p:clrMapOvr>
-</p:sld>
-</file>
-
-<file path=ppt/slides/slide29.xml><?xml version="1.0" encoding="utf-8"?>
 <p:sld xmlns:a="http://schemas.openxmlformats.org/drawingml/2006/main" xmlns:r="http://schemas.openxmlformats.org/officeDocument/2006/relationships" xmlns:p="http://schemas.openxmlformats.org/presentationml/2006/main">
   <p:cSld>
     <p:spTree>
@@ -7170,6 +6984,184 @@
 </p:sld>
 </file>
 
+<file path=ppt/slides/slide29.xml><?xml version="1.0" encoding="utf-8"?>
+<p:sld xmlns:a="http://schemas.openxmlformats.org/drawingml/2006/main" xmlns:r="http://schemas.openxmlformats.org/officeDocument/2006/relationships" xmlns:p="http://schemas.openxmlformats.org/presentationml/2006/main">
+  <p:cSld>
+    <p:spTree>
+      <p:nvGrpSpPr>
+        <p:cNvPr id="1" name=""/>
+        <p:cNvGrpSpPr/>
+        <p:nvPr/>
+      </p:nvGrpSpPr>
+      <p:grpSpPr>
+        <a:xfrm>
+          <a:off x="0" y="0"/>
+          <a:ext cx="0" cy="0"/>
+          <a:chOff x="0" y="0"/>
+          <a:chExt cx="0" cy="0"/>
+        </a:xfrm>
+      </p:grpSpPr>
+      <p:sp>
+        <p:nvSpPr>
+          <p:cNvPr id="2" name="Title 1">
+            <a:extLst>
+              <a:ext uri="{FF2B5EF4-FFF2-40B4-BE49-F238E27FC236}">
+                <a16:creationId xmlns:a16="http://schemas.microsoft.com/office/drawing/2014/main" id="{E1911810-221B-0B9B-8EF1-E3E9AF2CC0EF}"/>
+              </a:ext>
+            </a:extLst>
+          </p:cNvPr>
+          <p:cNvSpPr>
+            <a:spLocks noGrp="1"/>
+          </p:cNvSpPr>
+          <p:nvPr>
+            <p:ph type="title"/>
+          </p:nvPr>
+        </p:nvSpPr>
+        <p:spPr/>
+        <p:txBody>
+          <a:bodyPr/>
+          <a:lstStyle/>
+          <a:p>
+            <a:r>
+              <a:rPr lang="en-US" dirty="0"/>
+              <a:t>Similarity</a:t>
+            </a:r>
+          </a:p>
+        </p:txBody>
+      </p:sp>
+      <p:sp>
+        <p:nvSpPr>
+          <p:cNvPr id="3" name="Content Placeholder 2">
+            <a:extLst>
+              <a:ext uri="{FF2B5EF4-FFF2-40B4-BE49-F238E27FC236}">
+                <a16:creationId xmlns:a16="http://schemas.microsoft.com/office/drawing/2014/main" id="{7F565772-5993-CD65-796F-DE1F050D13DD}"/>
+              </a:ext>
+            </a:extLst>
+          </p:cNvPr>
+          <p:cNvSpPr>
+            <a:spLocks noGrp="1"/>
+          </p:cNvSpPr>
+          <p:nvPr>
+            <p:ph idx="1"/>
+          </p:nvPr>
+        </p:nvSpPr>
+        <p:spPr>
+          <a:xfrm>
+            <a:off x="4096473" y="1853754"/>
+            <a:ext cx="7802302" cy="4161031"/>
+          </a:xfrm>
+        </p:spPr>
+        <p:txBody>
+          <a:bodyPr/>
+          <a:lstStyle/>
+          <a:p>
+            <a:r>
+              <a:rPr lang="en-US" dirty="0"/>
+              <a:t>Closeness in N dimensions means that vectors are similar.</a:t>
+            </a:r>
+          </a:p>
+          <a:p>
+            <a:r>
+              <a:rPr lang="en-US" dirty="0"/>
+              <a:t>We can use this to evaluate the similarity of text. </a:t>
+            </a:r>
+          </a:p>
+          <a:p>
+            <a:pPr lvl="1"/>
+            <a:r>
+              <a:rPr lang="en-US" dirty="0"/>
+              <a:t>Individual words or pieces of text. </a:t>
+            </a:r>
+          </a:p>
+          <a:p>
+            <a:r>
+              <a:rPr lang="en-US" dirty="0"/>
+              <a:t>Two measures of similarity:</a:t>
+            </a:r>
+          </a:p>
+          <a:p>
+            <a:pPr lvl="1"/>
+            <a:r>
+              <a:rPr lang="en-US" dirty="0"/>
+              <a:t>Lexical – the words are the same. </a:t>
+            </a:r>
+          </a:p>
+          <a:p>
+            <a:pPr lvl="1"/>
+            <a:r>
+              <a:rPr lang="en-US" dirty="0"/>
+              <a:t>Semantic – the meaning is the same. Even if words aren’t. </a:t>
+            </a:r>
+          </a:p>
+          <a:p>
+            <a:r>
+              <a:rPr lang="en-US" dirty="0"/>
+              <a:t>Assuming our embeddings capture meaning, this can work well. </a:t>
+            </a:r>
+          </a:p>
+          <a:p>
+            <a:r>
+              <a:rPr lang="en-US" dirty="0"/>
+              <a:t>I used something like this to filter cheaters in a 2</a:t>
+            </a:r>
+            <a:r>
+              <a:rPr lang="en-US" baseline="30000" dirty="0"/>
+              <a:t>nd</a:t>
+            </a:r>
+            <a:r>
+              <a:rPr lang="en-US" dirty="0"/>
+              <a:t> year class. </a:t>
+            </a:r>
+          </a:p>
+          <a:p>
+            <a:pPr lvl="1"/>
+            <a:endParaRPr lang="en-US" dirty="0"/>
+          </a:p>
+        </p:txBody>
+      </p:sp>
+      <p:pic>
+        <p:nvPicPr>
+          <p:cNvPr id="4" name="Picture 3" descr="Comparison of different Word Embeddings on Text Similarity — A use case in  NLP | by Intellica.AI | Medium">
+            <a:extLst>
+              <a:ext uri="{FF2B5EF4-FFF2-40B4-BE49-F238E27FC236}">
+                <a16:creationId xmlns:a16="http://schemas.microsoft.com/office/drawing/2014/main" id="{B5F021D6-A473-A405-7EE5-3E509F384FDF}"/>
+              </a:ext>
+            </a:extLst>
+          </p:cNvPr>
+          <p:cNvPicPr>
+            <a:picLocks noChangeAspect="1"/>
+          </p:cNvPicPr>
+          <p:nvPr/>
+        </p:nvPicPr>
+        <p:blipFill>
+          <a:blip r:embed="rId2"/>
+          <a:stretch>
+            <a:fillRect/>
+          </a:stretch>
+        </p:blipFill>
+        <p:spPr>
+          <a:xfrm>
+            <a:off x="97420" y="1853754"/>
+            <a:ext cx="3999053" cy="3999053"/>
+          </a:xfrm>
+          <a:prstGeom prst="rect">
+            <a:avLst/>
+          </a:prstGeom>
+        </p:spPr>
+      </p:pic>
+    </p:spTree>
+    <p:extLst>
+      <p:ext uri="{BB962C8B-B14F-4D97-AF65-F5344CB8AC3E}">
+        <p14:creationId xmlns:p14="http://schemas.microsoft.com/office/powerpoint/2010/main" val="1940470041"/>
+      </p:ext>
+    </p:extLst>
+  </p:cSld>
+  <p:clrMapOvr>
+    <a:masterClrMapping/>
+  </p:clrMapOvr>
+</p:sld>
+</file>
+
 <file path=ppt/slides/slide3.xml><?xml version="1.0" encoding="utf-8"?>
 <p:sld xmlns:a="http://schemas.openxmlformats.org/drawingml/2006/main" xmlns:r="http://schemas.openxmlformats.org/officeDocument/2006/relationships" xmlns:p="http://schemas.openxmlformats.org/presentationml/2006/main">
   <p:cSld>
@@ -7301,6 +7293,176 @@
 </file>
 
 <file path=ppt/slides/slide30.xml><?xml version="1.0" encoding="utf-8"?>
+<p:sld xmlns:a="http://schemas.openxmlformats.org/drawingml/2006/main" xmlns:r="http://schemas.openxmlformats.org/officeDocument/2006/relationships" xmlns:p="http://schemas.openxmlformats.org/presentationml/2006/main" show="0">
+  <p:cSld>
+    <p:spTree>
+      <p:nvGrpSpPr>
+        <p:cNvPr id="1" name=""/>
+        <p:cNvGrpSpPr/>
+        <p:nvPr/>
+      </p:nvGrpSpPr>
+      <p:grpSpPr>
+        <a:xfrm>
+          <a:off x="0" y="0"/>
+          <a:ext cx="0" cy="0"/>
+          <a:chOff x="0" y="0"/>
+          <a:chExt cx="0" cy="0"/>
+        </a:xfrm>
+      </p:grpSpPr>
+      <p:sp>
+        <p:nvSpPr>
+          <p:cNvPr id="2" name="Title 1">
+            <a:extLst>
+              <a:ext uri="{FF2B5EF4-FFF2-40B4-BE49-F238E27FC236}">
+                <a16:creationId xmlns:a16="http://schemas.microsoft.com/office/drawing/2014/main" id="{E9DCB6D0-BB9E-0B3C-152B-239D65F64D44}"/>
+              </a:ext>
+            </a:extLst>
+          </p:cNvPr>
+          <p:cNvSpPr>
+            <a:spLocks noGrp="1"/>
+          </p:cNvSpPr>
+          <p:nvPr>
+            <p:ph type="title"/>
+          </p:nvPr>
+        </p:nvSpPr>
+        <p:spPr>
+          <a:xfrm>
+            <a:off x="1451580" y="804519"/>
+            <a:ext cx="4859686" cy="1049235"/>
+          </a:xfrm>
+        </p:spPr>
+        <p:txBody>
+          <a:bodyPr/>
+          <a:lstStyle/>
+          <a:p>
+            <a:r>
+              <a:rPr lang="en-US" dirty="0"/>
+              <a:t>Detour – </a:t>
+            </a:r>
+            <a:r>
+              <a:rPr lang="en-US" dirty="0" err="1"/>
+              <a:t>MultiModal</a:t>
+            </a:r>
+            <a:r>
+              <a:rPr lang="en-US" dirty="0"/>
+              <a:t> Models</a:t>
+            </a:r>
+          </a:p>
+        </p:txBody>
+      </p:sp>
+      <p:sp>
+        <p:nvSpPr>
+          <p:cNvPr id="3" name="Content Placeholder 2">
+            <a:extLst>
+              <a:ext uri="{FF2B5EF4-FFF2-40B4-BE49-F238E27FC236}">
+                <a16:creationId xmlns:a16="http://schemas.microsoft.com/office/drawing/2014/main" id="{4123335C-478C-C422-2490-567258DA4CE7}"/>
+              </a:ext>
+            </a:extLst>
+          </p:cNvPr>
+          <p:cNvSpPr>
+            <a:spLocks noGrp="1"/>
+          </p:cNvSpPr>
+          <p:nvPr>
+            <p:ph idx="1"/>
+          </p:nvPr>
+        </p:nvSpPr>
+        <p:spPr>
+          <a:xfrm>
+            <a:off x="1451579" y="1853754"/>
+            <a:ext cx="4859685" cy="4199727"/>
+          </a:xfrm>
+        </p:spPr>
+        <p:txBody>
+          <a:bodyPr/>
+          <a:lstStyle/>
+          <a:p>
+            <a:r>
+              <a:rPr lang="en-US" dirty="0"/>
+              <a:t>Many of the generative models are multi-modal, i.e. they deal with different types of content like text, images, video, </a:t>
+            </a:r>
+            <a:r>
+              <a:rPr lang="en-US" dirty="0" err="1"/>
+              <a:t>etc</a:t>
+            </a:r>
+            <a:r>
+              <a:rPr lang="en-US" dirty="0"/>
+              <a:t>…</a:t>
+            </a:r>
+          </a:p>
+          <a:p>
+            <a:r>
+              <a:rPr lang="en-US" dirty="0"/>
+              <a:t>This works by generating embeddings for each type of media, to a shared space. </a:t>
+            </a:r>
+          </a:p>
+          <a:p>
+            <a:pPr lvl="1"/>
+            <a:r>
+              <a:rPr lang="en-US" dirty="0"/>
+              <a:t>E.g. a picture labeled “</a:t>
+            </a:r>
+            <a:r>
+              <a:rPr lang="en-US" dirty="0" err="1"/>
+              <a:t>horse.jpg</a:t>
+            </a:r>
+            <a:r>
+              <a:rPr lang="en-US" dirty="0"/>
+              <a:t>” tells the model that a horse is X in text and Y in image.</a:t>
+            </a:r>
+          </a:p>
+          <a:p>
+            <a:pPr lvl="1"/>
+            <a:r>
+              <a:rPr lang="en-US" dirty="0"/>
+              <a:t>When someone asks for a horse, it “looks up” the image representations and gens…</a:t>
+            </a:r>
+          </a:p>
+        </p:txBody>
+      </p:sp>
+      <p:pic>
+        <p:nvPicPr>
+          <p:cNvPr id="4" name="Picture 3" descr="How LLMs See Images, Audio, and More">
+            <a:extLst>
+              <a:ext uri="{FF2B5EF4-FFF2-40B4-BE49-F238E27FC236}">
+                <a16:creationId xmlns:a16="http://schemas.microsoft.com/office/drawing/2014/main" id="{06012C61-BA30-0B91-4D6E-DEBD93FEA123}"/>
+              </a:ext>
+            </a:extLst>
+          </p:cNvPr>
+          <p:cNvPicPr>
+            <a:picLocks noChangeAspect="1"/>
+          </p:cNvPicPr>
+          <p:nvPr/>
+        </p:nvPicPr>
+        <p:blipFill>
+          <a:blip r:embed="rId2"/>
+          <a:stretch>
+            <a:fillRect/>
+          </a:stretch>
+        </p:blipFill>
+        <p:spPr>
+          <a:xfrm>
+            <a:off x="6311265" y="0"/>
+            <a:ext cx="5880735" cy="6858000"/>
+          </a:xfrm>
+          <a:prstGeom prst="rect">
+            <a:avLst/>
+          </a:prstGeom>
+        </p:spPr>
+      </p:pic>
+    </p:spTree>
+    <p:extLst>
+      <p:ext uri="{BB962C8B-B14F-4D97-AF65-F5344CB8AC3E}">
+        <p14:creationId xmlns:p14="http://schemas.microsoft.com/office/powerpoint/2010/main" val="769723518"/>
+      </p:ext>
+    </p:extLst>
+  </p:cSld>
+  <p:clrMapOvr>
+    <a:masterClrMapping/>
+  </p:clrMapOvr>
+</p:sld>
+</file>
+
+<file path=ppt/slides/slide31.xml><?xml version="1.0" encoding="utf-8"?>
 <p:sld xmlns:a="http://schemas.openxmlformats.org/drawingml/2006/main" xmlns:r="http://schemas.openxmlformats.org/officeDocument/2006/relationships" xmlns:p="http://schemas.openxmlformats.org/presentationml/2006/main">
   <p:cSld>
     <p:spTree>
@@ -7510,121 +7672,6 @@
 </p:sld>
 </file>
 
-<file path=ppt/slides/slide31.xml><?xml version="1.0" encoding="utf-8"?>
-<p:sld xmlns:a="http://schemas.openxmlformats.org/drawingml/2006/main" xmlns:r="http://schemas.openxmlformats.org/officeDocument/2006/relationships" xmlns:p="http://schemas.openxmlformats.org/presentationml/2006/main">
-  <p:cSld>
-    <p:spTree>
-      <p:nvGrpSpPr>
-        <p:cNvPr id="1" name=""/>
-        <p:cNvGrpSpPr/>
-        <p:nvPr/>
-      </p:nvGrpSpPr>
-      <p:grpSpPr>
-        <a:xfrm>
-          <a:off x="0" y="0"/>
-          <a:ext cx="0" cy="0"/>
-          <a:chOff x="0" y="0"/>
-          <a:chExt cx="0" cy="0"/>
-        </a:xfrm>
-      </p:grpSpPr>
-      <p:sp>
-        <p:nvSpPr>
-          <p:cNvPr id="2" name="Title 1">
-            <a:extLst>
-              <a:ext uri="{FF2B5EF4-FFF2-40B4-BE49-F238E27FC236}">
-                <a16:creationId xmlns:a16="http://schemas.microsoft.com/office/drawing/2014/main" id="{79ABC1E9-9DB9-D348-83D2-878E06DE33E3}"/>
-              </a:ext>
-            </a:extLst>
-          </p:cNvPr>
-          <p:cNvSpPr>
-            <a:spLocks noGrp="1"/>
-          </p:cNvSpPr>
-          <p:nvPr>
-            <p:ph type="title"/>
-          </p:nvPr>
-        </p:nvSpPr>
-        <p:spPr/>
-        <p:txBody>
-          <a:bodyPr/>
-          <a:lstStyle/>
-          <a:p>
-            <a:r>
-              <a:rPr lang="en-US" dirty="0"/>
-              <a:t>Word2Vec and Alternate encodings</a:t>
-            </a:r>
-          </a:p>
-        </p:txBody>
-      </p:sp>
-      <p:sp>
-        <p:nvSpPr>
-          <p:cNvPr id="3" name="Content Placeholder 2">
-            <a:extLst>
-              <a:ext uri="{FF2B5EF4-FFF2-40B4-BE49-F238E27FC236}">
-                <a16:creationId xmlns:a16="http://schemas.microsoft.com/office/drawing/2014/main" id="{3FB3ECEC-AE79-BF4D-99A3-10DDD2E855FC}"/>
-              </a:ext>
-            </a:extLst>
-          </p:cNvPr>
-          <p:cNvSpPr>
-            <a:spLocks noGrp="1"/>
-          </p:cNvSpPr>
-          <p:nvPr>
-            <p:ph idx="1"/>
-          </p:nvPr>
-        </p:nvSpPr>
-        <p:spPr>
-          <a:xfrm>
-            <a:off x="1451579" y="2015732"/>
-            <a:ext cx="9603275" cy="4037749"/>
-          </a:xfrm>
-        </p:spPr>
-        <p:txBody>
-          <a:bodyPr/>
-          <a:lstStyle/>
-          <a:p>
-            <a:r>
-              <a:rPr lang="en-US" dirty="0"/>
-              <a:t>There are lots of other NLP libraries out there that take different approaches to dealing with text. </a:t>
-            </a:r>
-          </a:p>
-          <a:p>
-            <a:r>
-              <a:rPr lang="en-US" dirty="0"/>
-              <a:t>One library we can use is Word2Vec, originally developed by Google. </a:t>
-            </a:r>
-          </a:p>
-          <a:p>
-            <a:r>
-              <a:rPr lang="en-US" dirty="0"/>
-              <a:t>Word2Vec transforms words into vector representations using a neural network. </a:t>
-            </a:r>
-          </a:p>
-          <a:p>
-            <a:r>
-              <a:rPr lang="en-US" dirty="0"/>
-              <a:t>Word2Vec looks at words and their surroundings in sentences (documents) to generate the encoding. </a:t>
-            </a:r>
-          </a:p>
-          <a:p>
-            <a:r>
-              <a:rPr lang="en-US" dirty="0"/>
-              <a:t>Each word gets a vector of values that encodes it, in M-dimensions. </a:t>
-            </a:r>
-          </a:p>
-        </p:txBody>
-      </p:sp>
-    </p:spTree>
-    <p:extLst>
-      <p:ext uri="{BB962C8B-B14F-4D97-AF65-F5344CB8AC3E}">
-        <p14:creationId xmlns:p14="http://schemas.microsoft.com/office/powerpoint/2010/main" val="2027915239"/>
-      </p:ext>
-    </p:extLst>
-  </p:cSld>
-  <p:clrMapOvr>
-    <a:masterClrMapping/>
-  </p:clrMapOvr>
-</p:sld>
-</file>
-
 <file path=ppt/slides/slide32.xml><?xml version="1.0" encoding="utf-8"?>
 <p:sld xmlns:a="http://schemas.openxmlformats.org/drawingml/2006/main" xmlns:r="http://schemas.openxmlformats.org/officeDocument/2006/relationships" xmlns:p="http://schemas.openxmlformats.org/presentationml/2006/main">
   <p:cSld>
@@ -7647,6 +7694,132 @@
           <p:cNvPr id="2" name="Title 1">
             <a:extLst>
               <a:ext uri="{FF2B5EF4-FFF2-40B4-BE49-F238E27FC236}">
+                <a16:creationId xmlns:a16="http://schemas.microsoft.com/office/drawing/2014/main" id="{79ABC1E9-9DB9-D348-83D2-878E06DE33E3}"/>
+              </a:ext>
+            </a:extLst>
+          </p:cNvPr>
+          <p:cNvSpPr>
+            <a:spLocks noGrp="1"/>
+          </p:cNvSpPr>
+          <p:nvPr>
+            <p:ph type="title"/>
+          </p:nvPr>
+        </p:nvSpPr>
+        <p:spPr/>
+        <p:txBody>
+          <a:bodyPr/>
+          <a:lstStyle/>
+          <a:p>
+            <a:r>
+              <a:rPr lang="en-US" dirty="0"/>
+              <a:t>Word2Vec and Alternate encodings</a:t>
+            </a:r>
+          </a:p>
+        </p:txBody>
+      </p:sp>
+      <p:sp>
+        <p:nvSpPr>
+          <p:cNvPr id="3" name="Content Placeholder 2">
+            <a:extLst>
+              <a:ext uri="{FF2B5EF4-FFF2-40B4-BE49-F238E27FC236}">
+                <a16:creationId xmlns:a16="http://schemas.microsoft.com/office/drawing/2014/main" id="{3FB3ECEC-AE79-BF4D-99A3-10DDD2E855FC}"/>
+              </a:ext>
+            </a:extLst>
+          </p:cNvPr>
+          <p:cNvSpPr>
+            <a:spLocks noGrp="1"/>
+          </p:cNvSpPr>
+          <p:nvPr>
+            <p:ph idx="1"/>
+          </p:nvPr>
+        </p:nvSpPr>
+        <p:spPr>
+          <a:xfrm>
+            <a:off x="1451579" y="2015732"/>
+            <a:ext cx="9603275" cy="4037749"/>
+          </a:xfrm>
+        </p:spPr>
+        <p:txBody>
+          <a:bodyPr/>
+          <a:lstStyle/>
+          <a:p>
+            <a:r>
+              <a:rPr lang="en-US" dirty="0"/>
+              <a:t>There are lots of other NLP libraries out there that take different approaches to dealing with text. </a:t>
+            </a:r>
+          </a:p>
+          <a:p>
+            <a:r>
+              <a:rPr lang="en-US" dirty="0"/>
+              <a:t>One library we can use is Word2Vec, originally developed by Google. </a:t>
+            </a:r>
+          </a:p>
+          <a:p>
+            <a:r>
+              <a:rPr lang="en-US" dirty="0"/>
+              <a:t>Word2Vec transforms words into vector representations using a neural network. </a:t>
+            </a:r>
+          </a:p>
+          <a:p>
+            <a:pPr lvl="1"/>
+            <a:r>
+              <a:rPr lang="en-US" dirty="0" err="1"/>
+              <a:t>Embbeddign</a:t>
+            </a:r>
+            <a:r>
+              <a:rPr lang="en-US" dirty="0"/>
+              <a:t> dimension is the </a:t>
+            </a:r>
+          </a:p>
+          <a:p>
+            <a:r>
+              <a:rPr lang="en-US" dirty="0"/>
+              <a:t>Word2Vec looks at words and their surroundings in sentences (documents) to generate the encoding. </a:t>
+            </a:r>
+          </a:p>
+          <a:p>
+            <a:r>
+              <a:rPr lang="en-US" dirty="0"/>
+              <a:t>Each word gets a vector of values that encodes it, in M-dimensions. </a:t>
+            </a:r>
+          </a:p>
+        </p:txBody>
+      </p:sp>
+    </p:spTree>
+    <p:extLst>
+      <p:ext uri="{BB962C8B-B14F-4D97-AF65-F5344CB8AC3E}">
+        <p14:creationId xmlns:p14="http://schemas.microsoft.com/office/powerpoint/2010/main" val="2027915239"/>
+      </p:ext>
+    </p:extLst>
+  </p:cSld>
+  <p:clrMapOvr>
+    <a:masterClrMapping/>
+  </p:clrMapOvr>
+</p:sld>
+</file>
+
+<file path=ppt/slides/slide33.xml><?xml version="1.0" encoding="utf-8"?>
+<p:sld xmlns:a="http://schemas.openxmlformats.org/drawingml/2006/main" xmlns:r="http://schemas.openxmlformats.org/officeDocument/2006/relationships" xmlns:p="http://schemas.openxmlformats.org/presentationml/2006/main">
+  <p:cSld>
+    <p:spTree>
+      <p:nvGrpSpPr>
+        <p:cNvPr id="1" name=""/>
+        <p:cNvGrpSpPr/>
+        <p:nvPr/>
+      </p:nvGrpSpPr>
+      <p:grpSpPr>
+        <a:xfrm>
+          <a:off x="0" y="0"/>
+          <a:ext cx="0" cy="0"/>
+          <a:chOff x="0" y="0"/>
+          <a:chExt cx="0" cy="0"/>
+        </a:xfrm>
+      </p:grpSpPr>
+      <p:sp>
+        <p:nvSpPr>
+          <p:cNvPr id="2" name="Title 1">
+            <a:extLst>
+              <a:ext uri="{FF2B5EF4-FFF2-40B4-BE49-F238E27FC236}">
                 <a16:creationId xmlns:a16="http://schemas.microsoft.com/office/drawing/2014/main" id="{8159B03E-04F7-EF5A-D8D9-115A09709A19}"/>
               </a:ext>
             </a:extLst>
@@ -7762,7 +7935,7 @@
 </p:sld>
 </file>
 
-<file path=ppt/slides/slide33.xml><?xml version="1.0" encoding="utf-8"?>
+<file path=ppt/slides/slide34.xml><?xml version="1.0" encoding="utf-8"?>
 <p:sld xmlns:a="http://schemas.openxmlformats.org/drawingml/2006/main" xmlns:r="http://schemas.openxmlformats.org/officeDocument/2006/relationships" xmlns:p="http://schemas.openxmlformats.org/presentationml/2006/main">
   <p:cSld>
     <p:spTree>
@@ -7900,7 +8073,7 @@
 </p:sld>
 </file>
 
-<file path=ppt/slides/slide34.xml><?xml version="1.0" encoding="utf-8"?>
+<file path=ppt/slides/slide35.xml><?xml version="1.0" encoding="utf-8"?>
 <p:sld xmlns:a="http://schemas.openxmlformats.org/drawingml/2006/main" xmlns:r="http://schemas.openxmlformats.org/officeDocument/2006/relationships" xmlns:p="http://schemas.openxmlformats.org/presentationml/2006/main" show="0">
   <p:cSld>
     <p:spTree>
@@ -7980,7 +8153,7 @@
 </p:sld>
 </file>
 
-<file path=ppt/slides/slide35.xml><?xml version="1.0" encoding="utf-8"?>
+<file path=ppt/slides/slide36.xml><?xml version="1.0" encoding="utf-8"?>
 <p:sld xmlns:a="http://schemas.openxmlformats.org/drawingml/2006/main" xmlns:r="http://schemas.openxmlformats.org/officeDocument/2006/relationships" xmlns:p="http://schemas.openxmlformats.org/presentationml/2006/main">
   <p:cSld>
     <p:spTree>
@@ -8125,7 +8298,7 @@
 </p:sld>
 </file>
 
-<file path=ppt/slides/slide36.xml><?xml version="1.0" encoding="utf-8"?>
+<file path=ppt/slides/slide37.xml><?xml version="1.0" encoding="utf-8"?>
 <p:sld xmlns:a="http://schemas.openxmlformats.org/drawingml/2006/main" xmlns:r="http://schemas.openxmlformats.org/officeDocument/2006/relationships" xmlns:p="http://schemas.openxmlformats.org/presentationml/2006/main">
   <p:cSld>
     <p:spTree>
@@ -8235,7 +8408,7 @@
 </p:sld>
 </file>
 
-<file path=ppt/slides/slide37.xml><?xml version="1.0" encoding="utf-8"?>
+<file path=ppt/slides/slide38.xml><?xml version="1.0" encoding="utf-8"?>
 <p:sld xmlns:a="http://schemas.openxmlformats.org/drawingml/2006/main" xmlns:r="http://schemas.openxmlformats.org/officeDocument/2006/relationships" xmlns:p="http://schemas.openxmlformats.org/presentationml/2006/main">
   <p:cSld>
     <p:spTree>
@@ -8380,7 +8553,7 @@
 </p:sld>
 </file>
 
-<file path=ppt/slides/slide38.xml><?xml version="1.0" encoding="utf-8"?>
+<file path=ppt/slides/slide39.xml><?xml version="1.0" encoding="utf-8"?>
 <p:sld xmlns:a="http://schemas.openxmlformats.org/drawingml/2006/main" xmlns:r="http://schemas.openxmlformats.org/officeDocument/2006/relationships" xmlns:p="http://schemas.openxmlformats.org/presentationml/2006/main" show="0">
   <p:cSld>
     <p:spTree>
@@ -8472,27 +8645,29 @@
           <a:p>
             <a:r>
               <a:rPr lang="en-US" dirty="0"/>
-              <a:t>With LLMs, this is key to predicting the next token.</a:t>
-            </a:r>
-          </a:p>
-          <a:p>
-            <a:pPr lvl="1"/>
-            <a:r>
-              <a:rPr lang="en-US" dirty="0"/>
-              <a:t>Model predicts a M-dim value of next word, select a token that is close to that. </a:t>
-            </a:r>
-          </a:p>
-          <a:p>
-            <a:r>
-              <a:rPr lang="en-US" dirty="0"/>
-              <a:t>This benefits from large amounts of data. </a:t>
-            </a:r>
-          </a:p>
-          <a:p>
-            <a:pPr lvl="1"/>
-            <a:r>
-              <a:rPr lang="en-US" dirty="0"/>
-              <a:t>English is messy, lots of context is needed to disambiguate meaning. </a:t>
+              <a:t>These models are trained, their target is embeddings and we provide text. </a:t>
+            </a:r>
+          </a:p>
+          <a:p>
+            <a:pPr lvl="1"/>
+            <a:r>
+              <a:rPr lang="en-US" dirty="0"/>
+              <a:t>This benefits from very, very, large amounts of data. </a:t>
+            </a:r>
+          </a:p>
+          <a:p>
+            <a:pPr lvl="1"/>
+            <a:r>
+              <a:rPr lang="en-US" dirty="0"/>
+              <a:t>E.g. can a model disambiguate all the meanings of “hit”, “cool”, </a:t>
+            </a:r>
+            <a:r>
+              <a:rPr lang="en-US" dirty="0" err="1"/>
+              <a:t>etc</a:t>
+            </a:r>
+            <a:r>
+              <a:rPr lang="en-US" dirty="0"/>
+              <a:t>…</a:t>
             </a:r>
           </a:p>
           <a:p>
@@ -8523,7 +8698,90 @@
 </p:sld>
 </file>
 
-<file path=ppt/slides/slide39.xml><?xml version="1.0" encoding="utf-8"?>
+<file path=ppt/slides/slide4.xml><?xml version="1.0" encoding="utf-8"?>
+<p:sld xmlns:a="http://schemas.openxmlformats.org/drawingml/2006/main" xmlns:r="http://schemas.openxmlformats.org/officeDocument/2006/relationships" xmlns:p="http://schemas.openxmlformats.org/presentationml/2006/main">
+  <p:cSld>
+    <p:spTree>
+      <p:nvGrpSpPr>
+        <p:cNvPr id="1" name=""/>
+        <p:cNvGrpSpPr/>
+        <p:nvPr/>
+      </p:nvGrpSpPr>
+      <p:grpSpPr>
+        <a:xfrm>
+          <a:off x="0" y="0"/>
+          <a:ext cx="0" cy="0"/>
+          <a:chOff x="0" y="0"/>
+          <a:chExt cx="0" cy="0"/>
+        </a:xfrm>
+      </p:grpSpPr>
+      <p:sp>
+        <p:nvSpPr>
+          <p:cNvPr id="2" name="Title 1">
+            <a:extLst>
+              <a:ext uri="{FF2B5EF4-FFF2-40B4-BE49-F238E27FC236}">
+                <a16:creationId xmlns:a16="http://schemas.microsoft.com/office/drawing/2014/main" id="{A4FF979B-3BE2-8A46-8F66-12A03A428907}"/>
+              </a:ext>
+            </a:extLst>
+          </p:cNvPr>
+          <p:cNvSpPr>
+            <a:spLocks noGrp="1"/>
+          </p:cNvSpPr>
+          <p:nvPr>
+            <p:ph type="ctrTitle"/>
+          </p:nvPr>
+        </p:nvSpPr>
+        <p:spPr/>
+        <p:txBody>
+          <a:bodyPr/>
+          <a:lstStyle/>
+          <a:p>
+            <a:r>
+              <a:rPr lang="en-US" dirty="0"/>
+              <a:t>NLP Part 2</a:t>
+            </a:r>
+          </a:p>
+        </p:txBody>
+      </p:sp>
+      <p:sp>
+        <p:nvSpPr>
+          <p:cNvPr id="3" name="Subtitle 2">
+            <a:extLst>
+              <a:ext uri="{FF2B5EF4-FFF2-40B4-BE49-F238E27FC236}">
+                <a16:creationId xmlns:a16="http://schemas.microsoft.com/office/drawing/2014/main" id="{726EF9AF-2934-5C49-BEA4-8229E37E25B1}"/>
+              </a:ext>
+            </a:extLst>
+          </p:cNvPr>
+          <p:cNvSpPr>
+            <a:spLocks noGrp="1"/>
+          </p:cNvSpPr>
+          <p:nvPr>
+            <p:ph type="subTitle" idx="1"/>
+          </p:nvPr>
+        </p:nvSpPr>
+        <p:spPr/>
+        <p:txBody>
+          <a:bodyPr/>
+          <a:lstStyle/>
+          <a:p>
+            <a:endParaRPr lang="en-US"/>
+          </a:p>
+        </p:txBody>
+      </p:sp>
+    </p:spTree>
+    <p:extLst>
+      <p:ext uri="{BB962C8B-B14F-4D97-AF65-F5344CB8AC3E}">
+        <p14:creationId xmlns:p14="http://schemas.microsoft.com/office/powerpoint/2010/main" val="1673785752"/>
+      </p:ext>
+    </p:extLst>
+  </p:cSld>
+  <p:clrMapOvr>
+    <a:masterClrMapping/>
+  </p:clrMapOvr>
+</p:sld>
+</file>
+
+<file path=ppt/slides/slide40.xml><?xml version="1.0" encoding="utf-8"?>
 <p:sld xmlns:a="http://schemas.openxmlformats.org/drawingml/2006/main" xmlns:r="http://schemas.openxmlformats.org/officeDocument/2006/relationships" xmlns:p="http://schemas.openxmlformats.org/presentationml/2006/main">
   <p:cSld>
     <p:spTree>
@@ -8693,90 +8951,7 @@
 </p:sld>
 </file>
 
-<file path=ppt/slides/slide4.xml><?xml version="1.0" encoding="utf-8"?>
-<p:sld xmlns:a="http://schemas.openxmlformats.org/drawingml/2006/main" xmlns:r="http://schemas.openxmlformats.org/officeDocument/2006/relationships" xmlns:p="http://schemas.openxmlformats.org/presentationml/2006/main">
-  <p:cSld>
-    <p:spTree>
-      <p:nvGrpSpPr>
-        <p:cNvPr id="1" name=""/>
-        <p:cNvGrpSpPr/>
-        <p:nvPr/>
-      </p:nvGrpSpPr>
-      <p:grpSpPr>
-        <a:xfrm>
-          <a:off x="0" y="0"/>
-          <a:ext cx="0" cy="0"/>
-          <a:chOff x="0" y="0"/>
-          <a:chExt cx="0" cy="0"/>
-        </a:xfrm>
-      </p:grpSpPr>
-      <p:sp>
-        <p:nvSpPr>
-          <p:cNvPr id="2" name="Title 1">
-            <a:extLst>
-              <a:ext uri="{FF2B5EF4-FFF2-40B4-BE49-F238E27FC236}">
-                <a16:creationId xmlns:a16="http://schemas.microsoft.com/office/drawing/2014/main" id="{A4FF979B-3BE2-8A46-8F66-12A03A428907}"/>
-              </a:ext>
-            </a:extLst>
-          </p:cNvPr>
-          <p:cNvSpPr>
-            <a:spLocks noGrp="1"/>
-          </p:cNvSpPr>
-          <p:nvPr>
-            <p:ph type="ctrTitle"/>
-          </p:nvPr>
-        </p:nvSpPr>
-        <p:spPr/>
-        <p:txBody>
-          <a:bodyPr/>
-          <a:lstStyle/>
-          <a:p>
-            <a:r>
-              <a:rPr lang="en-US" dirty="0"/>
-              <a:t>NLP Part 2</a:t>
-            </a:r>
-          </a:p>
-        </p:txBody>
-      </p:sp>
-      <p:sp>
-        <p:nvSpPr>
-          <p:cNvPr id="3" name="Subtitle 2">
-            <a:extLst>
-              <a:ext uri="{FF2B5EF4-FFF2-40B4-BE49-F238E27FC236}">
-                <a16:creationId xmlns:a16="http://schemas.microsoft.com/office/drawing/2014/main" id="{726EF9AF-2934-5C49-BEA4-8229E37E25B1}"/>
-              </a:ext>
-            </a:extLst>
-          </p:cNvPr>
-          <p:cNvSpPr>
-            <a:spLocks noGrp="1"/>
-          </p:cNvSpPr>
-          <p:nvPr>
-            <p:ph type="subTitle" idx="1"/>
-          </p:nvPr>
-        </p:nvSpPr>
-        <p:spPr/>
-        <p:txBody>
-          <a:bodyPr/>
-          <a:lstStyle/>
-          <a:p>
-            <a:endParaRPr lang="en-US"/>
-          </a:p>
-        </p:txBody>
-      </p:sp>
-    </p:spTree>
-    <p:extLst>
-      <p:ext uri="{BB962C8B-B14F-4D97-AF65-F5344CB8AC3E}">
-        <p14:creationId xmlns:p14="http://schemas.microsoft.com/office/powerpoint/2010/main" val="1673785752"/>
-      </p:ext>
-    </p:extLst>
-  </p:cSld>
-  <p:clrMapOvr>
-    <a:masterClrMapping/>
-  </p:clrMapOvr>
-</p:sld>
-</file>
-
-<file path=ppt/slides/slide40.xml><?xml version="1.0" encoding="utf-8"?>
+<file path=ppt/slides/slide41.xml><?xml version="1.0" encoding="utf-8"?>
 <p:sld xmlns:a="http://schemas.openxmlformats.org/drawingml/2006/main" xmlns:r="http://schemas.openxmlformats.org/officeDocument/2006/relationships" xmlns:p="http://schemas.openxmlformats.org/presentationml/2006/main">
   <p:cSld>
     <p:spTree>
@@ -9018,7 +9193,7 @@
 </p:sld>
 </file>
 
-<file path=ppt/slides/slide41.xml><?xml version="1.0" encoding="utf-8"?>
+<file path=ppt/slides/slide42.xml><?xml version="1.0" encoding="utf-8"?>
 <p:sld xmlns:a="http://schemas.openxmlformats.org/drawingml/2006/main" xmlns:r="http://schemas.openxmlformats.org/officeDocument/2006/relationships" xmlns:p="http://schemas.openxmlformats.org/presentationml/2006/main" show="0">
   <p:cSld>
     <p:spTree>
@@ -9149,7 +9324,7 @@
 </p:sld>
 </file>
 
-<file path=ppt/slides/slide42.xml><?xml version="1.0" encoding="utf-8"?>
+<file path=ppt/slides/slide43.xml><?xml version="1.0" encoding="utf-8"?>
 <p:sld xmlns:a="http://schemas.openxmlformats.org/drawingml/2006/main" xmlns:r="http://schemas.openxmlformats.org/officeDocument/2006/relationships" xmlns:p="http://schemas.openxmlformats.org/presentationml/2006/main">
   <p:cSld>
     <p:spTree>
@@ -9212,29 +9387,38 @@
         </p:nvSpPr>
         <p:spPr>
           <a:xfrm>
-            <a:off x="972273" y="1853754"/>
-            <a:ext cx="4838219" cy="4280828"/>
+            <a:off x="254643" y="1853754"/>
+            <a:ext cx="5555850" cy="4280828"/>
           </a:xfrm>
         </p:spPr>
         <p:txBody>
-          <a:bodyPr/>
-          <a:lstStyle/>
-          <a:p>
-            <a:r>
-              <a:rPr lang="en-US" dirty="0"/>
-              <a:t>No matter the process, we end up with usable features to feed a model. </a:t>
-            </a:r>
-          </a:p>
-          <a:p>
-            <a:r>
-              <a:rPr lang="en-US" dirty="0"/>
-              <a:t>If these features capture meaning varies. </a:t>
-            </a:r>
-          </a:p>
-          <a:p>
-            <a:r>
-              <a:rPr lang="en-US" dirty="0"/>
-              <a:t>More elaborate systems can capture ‘deeper’ meaning. </a:t>
+          <a:bodyPr>
+            <a:normAutofit/>
+          </a:bodyPr>
+          <a:lstStyle/>
+          <a:p>
+            <a:r>
+              <a:rPr lang="en-US" dirty="0"/>
+              <a:t>No matter the process, we end up with (hopefully) usable features to feed a model. </a:t>
+            </a:r>
+          </a:p>
+          <a:p>
+            <a:r>
+              <a:rPr lang="en-US" dirty="0"/>
+              <a:t>If these features capture good meaning varies. </a:t>
+            </a:r>
+          </a:p>
+          <a:p>
+            <a:pPr lvl="1"/>
+            <a:r>
+              <a:rPr lang="en-US" dirty="0"/>
+              <a:t>Different tasks need different meaning. </a:t>
+            </a:r>
+          </a:p>
+          <a:p>
+            <a:r>
+              <a:rPr lang="en-US" dirty="0"/>
+              <a:t>Elaborate systems can capture ‘deeper’ meaning. </a:t>
             </a:r>
           </a:p>
           <a:p>
@@ -9254,12 +9438,8 @@
           <a:p>
             <a:pPr lvl="1"/>
             <a:r>
-              <a:rPr lang="en-US" dirty="0" err="1"/>
-              <a:t>Subword</a:t>
-            </a:r>
-            <a:r>
-              <a:rPr lang="en-US" dirty="0"/>
-              <a:t> tokenization (splits </a:t>
+              <a:rPr lang="en-US" dirty="0"/>
+              <a:t>Byte-pair tokenization (splits </a:t>
             </a:r>
             <a:r>
               <a:rPr lang="en-US" dirty="0" err="1"/>
@@ -9322,159 +9502,6 @@
 </p:sld>
 </file>
 
-<file path=ppt/slides/slide43.xml><?xml version="1.0" encoding="utf-8"?>
-<p:sld xmlns:a="http://schemas.openxmlformats.org/drawingml/2006/main" xmlns:r="http://schemas.openxmlformats.org/officeDocument/2006/relationships" xmlns:p="http://schemas.openxmlformats.org/presentationml/2006/main">
-  <p:cSld>
-    <p:spTree>
-      <p:nvGrpSpPr>
-        <p:cNvPr id="1" name=""/>
-        <p:cNvGrpSpPr/>
-        <p:nvPr/>
-      </p:nvGrpSpPr>
-      <p:grpSpPr>
-        <a:xfrm>
-          <a:off x="0" y="0"/>
-          <a:ext cx="0" cy="0"/>
-          <a:chOff x="0" y="0"/>
-          <a:chExt cx="0" cy="0"/>
-        </a:xfrm>
-      </p:grpSpPr>
-      <p:sp>
-        <p:nvSpPr>
-          <p:cNvPr id="2" name="Title 1">
-            <a:extLst>
-              <a:ext uri="{FF2B5EF4-FFF2-40B4-BE49-F238E27FC236}">
-                <a16:creationId xmlns:a16="http://schemas.microsoft.com/office/drawing/2014/main" id="{2F6D39ED-4049-484A-8A23-EF2C3DFB812B}"/>
-              </a:ext>
-            </a:extLst>
-          </p:cNvPr>
-          <p:cNvSpPr>
-            <a:spLocks noGrp="1"/>
-          </p:cNvSpPr>
-          <p:nvPr>
-            <p:ph type="title"/>
-          </p:nvPr>
-        </p:nvSpPr>
-        <p:spPr/>
-        <p:txBody>
-          <a:bodyPr/>
-          <a:lstStyle/>
-          <a:p>
-            <a:r>
-              <a:rPr lang="en-US" dirty="0"/>
-              <a:t>NLP in Practice</a:t>
-            </a:r>
-          </a:p>
-        </p:txBody>
-      </p:sp>
-      <p:sp>
-        <p:nvSpPr>
-          <p:cNvPr id="3" name="Content Placeholder 2">
-            <a:extLst>
-              <a:ext uri="{FF2B5EF4-FFF2-40B4-BE49-F238E27FC236}">
-                <a16:creationId xmlns:a16="http://schemas.microsoft.com/office/drawing/2014/main" id="{776F59CA-DD5B-E345-972A-8104869FCF33}"/>
-              </a:ext>
-            </a:extLst>
-          </p:cNvPr>
-          <p:cNvSpPr>
-            <a:spLocks noGrp="1"/>
-          </p:cNvSpPr>
-          <p:nvPr>
-            <p:ph idx="1"/>
-          </p:nvPr>
-        </p:nvSpPr>
-        <p:spPr>
-          <a:xfrm>
-            <a:off x="1451579" y="1853754"/>
-            <a:ext cx="9603275" cy="4199727"/>
-          </a:xfrm>
-        </p:spPr>
-        <p:txBody>
-          <a:bodyPr>
-            <a:normAutofit lnSpcReduction="10000"/>
-          </a:bodyPr>
-          <a:lstStyle/>
-          <a:p>
-            <a:r>
-              <a:rPr lang="en-US" dirty="0"/>
-              <a:t>NLP is an area that is very quickly developing. </a:t>
-            </a:r>
-          </a:p>
-          <a:p>
-            <a:r>
-              <a:rPr lang="en-US" dirty="0"/>
-              <a:t>More data makes a big difference!</a:t>
-            </a:r>
-          </a:p>
-          <a:p>
-            <a:pPr lvl="1"/>
-            <a:r>
-              <a:rPr lang="en-US" dirty="0"/>
-              <a:t>Language has subtleties, massive datasets allow those subtleties to become patterns. </a:t>
-            </a:r>
-          </a:p>
-          <a:p>
-            <a:pPr lvl="1"/>
-            <a:r>
-              <a:rPr lang="en-US" dirty="0"/>
-              <a:t>Models may have kind of stalled, where is there more human text to use to train? </a:t>
-            </a:r>
-          </a:p>
-          <a:p>
-            <a:r>
-              <a:rPr lang="en-US" dirty="0"/>
-              <a:t>Preprocessing choices can make massive differences:</a:t>
-            </a:r>
-          </a:p>
-          <a:p>
-            <a:pPr lvl="1"/>
-            <a:r>
-              <a:rPr lang="en-US" dirty="0"/>
-              <a:t>Stemming, lemmatization, stop words, and n-gram size all vary widely depending on context. </a:t>
-            </a:r>
-          </a:p>
-          <a:p>
-            <a:r>
-              <a:rPr lang="en-US" dirty="0"/>
-              <a:t>The embedding space quality matters as much or more than the predictor. </a:t>
-            </a:r>
-          </a:p>
-          <a:p>
-            <a:pPr lvl="1"/>
-            <a:r>
-              <a:rPr lang="en-US" dirty="0"/>
-              <a:t>Like images, we must represent text as numbers – how well we do this is critical. </a:t>
-            </a:r>
-          </a:p>
-          <a:p>
-            <a:pPr lvl="1"/>
-            <a:r>
-              <a:rPr lang="en-US" dirty="0"/>
-              <a:t>This is a source of irreducible error for the predictive model. </a:t>
-            </a:r>
-          </a:p>
-          <a:p>
-            <a:pPr lvl="1"/>
-            <a:r>
-              <a:rPr lang="en-US" dirty="0"/>
-              <a:t>E.g. the word “lit” has a different lemma on Twitter, in a college English dept, or for wildfires. </a:t>
-            </a:r>
-          </a:p>
-        </p:txBody>
-      </p:sp>
-    </p:spTree>
-    <p:extLst>
-      <p:ext uri="{BB962C8B-B14F-4D97-AF65-F5344CB8AC3E}">
-        <p14:creationId xmlns:p14="http://schemas.microsoft.com/office/powerpoint/2010/main" val="2196243548"/>
-      </p:ext>
-    </p:extLst>
-  </p:cSld>
-  <p:clrMapOvr>
-    <a:masterClrMapping/>
-  </p:clrMapOvr>
-</p:sld>
-</file>
-
 <file path=ppt/slides/slide44.xml><?xml version="1.0" encoding="utf-8"?>
 <p:sld xmlns:a="http://schemas.openxmlformats.org/drawingml/2006/main" xmlns:r="http://schemas.openxmlformats.org/officeDocument/2006/relationships" xmlns:p="http://schemas.openxmlformats.org/presentationml/2006/main">
   <p:cSld>
@@ -9497,6 +9524,159 @@
           <p:cNvPr id="2" name="Title 1">
             <a:extLst>
               <a:ext uri="{FF2B5EF4-FFF2-40B4-BE49-F238E27FC236}">
+                <a16:creationId xmlns:a16="http://schemas.microsoft.com/office/drawing/2014/main" id="{2F6D39ED-4049-484A-8A23-EF2C3DFB812B}"/>
+              </a:ext>
+            </a:extLst>
+          </p:cNvPr>
+          <p:cNvSpPr>
+            <a:spLocks noGrp="1"/>
+          </p:cNvSpPr>
+          <p:nvPr>
+            <p:ph type="title"/>
+          </p:nvPr>
+        </p:nvSpPr>
+        <p:spPr/>
+        <p:txBody>
+          <a:bodyPr/>
+          <a:lstStyle/>
+          <a:p>
+            <a:r>
+              <a:rPr lang="en-US" dirty="0"/>
+              <a:t>NLP in Practice</a:t>
+            </a:r>
+          </a:p>
+        </p:txBody>
+      </p:sp>
+      <p:sp>
+        <p:nvSpPr>
+          <p:cNvPr id="3" name="Content Placeholder 2">
+            <a:extLst>
+              <a:ext uri="{FF2B5EF4-FFF2-40B4-BE49-F238E27FC236}">
+                <a16:creationId xmlns:a16="http://schemas.microsoft.com/office/drawing/2014/main" id="{776F59CA-DD5B-E345-972A-8104869FCF33}"/>
+              </a:ext>
+            </a:extLst>
+          </p:cNvPr>
+          <p:cNvSpPr>
+            <a:spLocks noGrp="1"/>
+          </p:cNvSpPr>
+          <p:nvPr>
+            <p:ph idx="1"/>
+          </p:nvPr>
+        </p:nvSpPr>
+        <p:spPr>
+          <a:xfrm>
+            <a:off x="1451579" y="1853754"/>
+            <a:ext cx="9603275" cy="4199727"/>
+          </a:xfrm>
+        </p:spPr>
+        <p:txBody>
+          <a:bodyPr>
+            <a:normAutofit lnSpcReduction="10000"/>
+          </a:bodyPr>
+          <a:lstStyle/>
+          <a:p>
+            <a:r>
+              <a:rPr lang="en-US" dirty="0"/>
+              <a:t>NLP is an area that is very quickly developing. </a:t>
+            </a:r>
+          </a:p>
+          <a:p>
+            <a:r>
+              <a:rPr lang="en-US" dirty="0"/>
+              <a:t>More data makes a big difference!</a:t>
+            </a:r>
+          </a:p>
+          <a:p>
+            <a:pPr lvl="1"/>
+            <a:r>
+              <a:rPr lang="en-US" dirty="0"/>
+              <a:t>Language has subtleties, massive datasets allow those subtleties to become patterns. </a:t>
+            </a:r>
+          </a:p>
+          <a:p>
+            <a:pPr lvl="1"/>
+            <a:r>
+              <a:rPr lang="en-US" dirty="0"/>
+              <a:t>Models may have kind of stalled, where is there more human text to use to train? </a:t>
+            </a:r>
+          </a:p>
+          <a:p>
+            <a:r>
+              <a:rPr lang="en-US" dirty="0"/>
+              <a:t>Preprocessing choices can make massive differences:</a:t>
+            </a:r>
+          </a:p>
+          <a:p>
+            <a:pPr lvl="1"/>
+            <a:r>
+              <a:rPr lang="en-US" dirty="0"/>
+              <a:t>Stemming, lemmatization, stop words, and n-gram size all vary widely depending on context. </a:t>
+            </a:r>
+          </a:p>
+          <a:p>
+            <a:r>
+              <a:rPr lang="en-US" dirty="0"/>
+              <a:t>The embedding space quality matters as much or more than the predictor. </a:t>
+            </a:r>
+          </a:p>
+          <a:p>
+            <a:pPr lvl="1"/>
+            <a:r>
+              <a:rPr lang="en-US" dirty="0"/>
+              <a:t>Like images, we must represent text as numbers – how well we do this is critical. </a:t>
+            </a:r>
+          </a:p>
+          <a:p>
+            <a:pPr lvl="1"/>
+            <a:r>
+              <a:rPr lang="en-US" dirty="0"/>
+              <a:t>This is a source of irreducible error for the predictive model. </a:t>
+            </a:r>
+          </a:p>
+          <a:p>
+            <a:pPr lvl="1"/>
+            <a:r>
+              <a:rPr lang="en-US" dirty="0"/>
+              <a:t>E.g. the word “lit” has a different lemma on Twitter, in a college English dept, or for wildfires. </a:t>
+            </a:r>
+          </a:p>
+        </p:txBody>
+      </p:sp>
+    </p:spTree>
+    <p:extLst>
+      <p:ext uri="{BB962C8B-B14F-4D97-AF65-F5344CB8AC3E}">
+        <p14:creationId xmlns:p14="http://schemas.microsoft.com/office/powerpoint/2010/main" val="2196243548"/>
+      </p:ext>
+    </p:extLst>
+  </p:cSld>
+  <p:clrMapOvr>
+    <a:masterClrMapping/>
+  </p:clrMapOvr>
+</p:sld>
+</file>
+
+<file path=ppt/slides/slide45.xml><?xml version="1.0" encoding="utf-8"?>
+<p:sld xmlns:a="http://schemas.openxmlformats.org/drawingml/2006/main" xmlns:r="http://schemas.openxmlformats.org/officeDocument/2006/relationships" xmlns:p="http://schemas.openxmlformats.org/presentationml/2006/main">
+  <p:cSld>
+    <p:spTree>
+      <p:nvGrpSpPr>
+        <p:cNvPr id="1" name=""/>
+        <p:cNvGrpSpPr/>
+        <p:nvPr/>
+      </p:nvGrpSpPr>
+      <p:grpSpPr>
+        <a:xfrm>
+          <a:off x="0" y="0"/>
+          <a:ext cx="0" cy="0"/>
+          <a:chOff x="0" y="0"/>
+          <a:chExt cx="0" cy="0"/>
+        </a:xfrm>
+      </p:grpSpPr>
+      <p:sp>
+        <p:nvSpPr>
+          <p:cNvPr id="2" name="Title 1">
+            <a:extLst>
+              <a:ext uri="{FF2B5EF4-FFF2-40B4-BE49-F238E27FC236}">
                 <a16:creationId xmlns:a16="http://schemas.microsoft.com/office/drawing/2014/main" id="{984A237C-6E20-E34E-B7D9-06A3FF0331A8}"/>
               </a:ext>
             </a:extLst>
@@ -9623,7 +9803,7 @@
 </p:sld>
 </file>
 
-<file path=ppt/slides/slide45.xml><?xml version="1.0" encoding="utf-8"?>
+<file path=ppt/slides/slide46.xml><?xml version="1.0" encoding="utf-8"?>
 <p:sld xmlns:a="http://schemas.openxmlformats.org/drawingml/2006/main" xmlns:r="http://schemas.openxmlformats.org/officeDocument/2006/relationships" xmlns:p="http://schemas.openxmlformats.org/presentationml/2006/main">
   <p:cSld>
     <p:spTree>
